--- a/slides/pptx/week14.pptx
+++ b/slides/pptx/week14.pptx
@@ -605,7 +605,8 @@
           <a:p>
             <a:r>
               <a:rPr lang="en-US" dirty="0"/>
-              <a:t>The argument underneath everything today: prompt = system + "\nUser: " + user is ONE string, so the model has no way to tell "instructions I trust" from "text I should just process." Land on the last line before moving to Defenses — it's the direct setup for the three guardrail functions the sim demonstrates next. ~5 min.</a:t>
+              <a:t>The argument underneath everything today: prompt = system + "\nUser: " + user is ONE string, so the model has no way to tell "instructions I trust" from "text I should just process." Land on the last line before moving to Defenses — it's the direct setup for the three guardrail functions the sim demonstrates next. ~5 min.
+Diagram: The system prompt, the user's typed turn, and any retrieved document all arrive at the model as the same run of text, with nothing marking any of it as data instead of instruction. The reply leaves the same way — untrusted, attacker-shaped text — and if it's passed unescaped into HTML, a shell, or SQL, whatever the model said just executes there. The model itself cannot fix this: there's no tag inside the context window that says "this part is data." The guards have to live outside the model — input_guardrail, redact_secret and escape — which is exactly guarded_chatbot.py.</a:t>
             </a:r>
             <a:endParaRPr lang="en-US" dirty="0"/>
           </a:p>
@@ -2212,7 +2213,7 @@
       </p:grpSpPr>
       <p:pic>
         <p:nvPicPr>
-          <p:cNvPr id="2" name="Image 0" descr="/Users/pop7/Library/CloudStorage/OneDrive-MonsterConnectCo.,Ltd/Lecture/KOSEN69 - software-security/slides/pptx/assets/logo-small.png">    </p:cNvPr>
+          <p:cNvPr id="2" name="Image 0" descr="/private/tmp/claude-501/-Users-pop7-Library-CloudStorage-OneDrive-MonsterConnectCo--Ltd-Lecture-KOSEN69---software-security/e6d6556f-17de-403d-a9a0-cf2f846149b4/scratchpad/tree/slides/pptx/assets/logo-small.png">    </p:cNvPr>
           <p:cNvPicPr>
             <a:picLocks noChangeAspect="1"/>
           </p:cNvPicPr>
@@ -2476,50 +2477,33 @@
           </a:p>
         </p:txBody>
       </p:sp>
-      <p:sp>
-        <p:nvSpPr>
-          <p:cNvPr id="5" name="Text 2"/>
-          <p:cNvSpPr/>
-          <p:nvPr/>
-        </p:nvSpPr>
-        <p:spPr>
-          <a:xfrm>
-            <a:off x="548640" y="1325880"/>
-            <a:ext cx="8046720" cy="2194560"/>
-          </a:xfrm>
-          <a:prstGeom prst="rect">
-            <a:avLst/>
-          </a:prstGeom>
-          <a:noFill/>
-          <a:ln/>
-        </p:spPr>
-        <p:txBody>
-          <a:bodyPr wrap="square" lIns="0" tIns="0" rIns="0" bIns="0" rtlCol="0" anchor="t">
-            <a:normAutofit/>
-          </a:bodyPr>
-          <a:lstStyle/>
-          <a:p>
-            <a:pPr indent="0" marL="0">
-              <a:buNone/>
-            </a:pPr>
-            <a:r>
-              <a:rPr lang="en-US" sz="1400" dirty="0">
-                <a:solidFill>
-                  <a:srgbClr val="1F2937"/>
-                </a:solidFill>
-                <a:latin typeface="Calibri" pitchFamily="34" charset="0"/>
-                <a:ea typeface="Calibri" pitchFamily="34" charset="-122"/>
-                <a:cs typeface="Calibri" pitchFamily="34" charset="-120"/>
-              </a:rPr>
-              <a:t>See diagram: The system prompt, the user's typed turn, and any retrieved document all arrive at the model as the same run of text, with nothing marking any of it as data instead of instruction. The reply leaves the same way — untrusted, attacker-shaped text — and if it's passed unescaped into HTML, a shell, or SQL, whatever the model said just executes there. The model itself cannot fix this: there's no tag inside the context window that says "this part is data." The guards have to live outside the model — input_guardrail, redact_secret and escape — which is exactly guarded_chatbot.py. (web only)</a:t>
-            </a:r>
-            <a:endParaRPr lang="en-US" sz="1400" dirty="0"/>
-          </a:p>
-        </p:txBody>
-      </p:sp>
-      <p:sp>
-        <p:nvSpPr>
-          <p:cNvPr id="6" name="Text 3"/>
+      <p:pic>
+        <p:nvPicPr>
+          <p:cNvPr id="5" name="Image 1" descr="The system prompt, the user's typed turn, and any retrieved document all arrive at the model as the same run of text, with nothing marking any of it as data instead of instruction. The reply leaves the same way — untrusted, attacker-shaped text — and if it's passed unescaped into HTML, a shell, or SQL, whatever the model said just executes there. The model itself cannot fix this: there's no tag inside the context window that says &quot;this part is data.&quot; The guards have to live outside the model — input_guardrail, redact_secret and escape — which is exactly guarded_chatbot.py.">    </p:cNvPr>
+          <p:cNvPicPr>
+            <a:picLocks noChangeAspect="1"/>
+          </p:cNvPicPr>
+          <p:nvPr/>
+        </p:nvPicPr>
+        <p:blipFill>
+          <a:blip r:embed="rId2"/>
+          <a:stretch>
+            <a:fillRect/>
+          </a:stretch>
+        </p:blipFill>
+        <p:spPr>
+          <a:xfrm>
+            <a:off x="2695074" y="1097280"/>
+            <a:ext cx="3753853" cy="3566160"/>
+          </a:xfrm>
+          <a:prstGeom prst="rect">
+            <a:avLst/>
+          </a:prstGeom>
+        </p:spPr>
+      </p:pic>
+      <p:sp>
+        <p:nvSpPr>
+          <p:cNvPr id="6" name="Text 2"/>
           <p:cNvSpPr/>
           <p:nvPr/>
         </p:nvSpPr>
@@ -2558,14 +2542,14 @@
       </p:sp>
       <p:pic>
         <p:nvPicPr>
-          <p:cNvPr id="7" name="Image 1" descr="/Users/pop7/Library/CloudStorage/OneDrive-MonsterConnectCo.,Ltd/Lecture/KOSEN69 - software-security/slides/pptx/assets/logo-small.png">    </p:cNvPr>
+          <p:cNvPr id="7" name="Image 2" descr="/private/tmp/claude-501/-Users-pop7-Library-CloudStorage-OneDrive-MonsterConnectCo--Ltd-Lecture-KOSEN69---software-security/e6d6556f-17de-403d-a9a0-cf2f846149b4/scratchpad/tree/slides/pptx/assets/logo-small.png">    </p:cNvPr>
           <p:cNvPicPr>
             <a:picLocks noChangeAspect="1"/>
           </p:cNvPicPr>
           <p:nvPr/>
         </p:nvPicPr>
         <p:blipFill>
-          <a:blip r:embed="rId2"/>
+          <a:blip r:embed="rId3"/>
           <a:stretch>
             <a:fillRect/>
           </a:stretch>
@@ -2921,7 +2905,7 @@
       </p:sp>
       <p:pic>
         <p:nvPicPr>
-          <p:cNvPr id="9" name="Image 1" descr="/Users/pop7/Library/CloudStorage/OneDrive-MonsterConnectCo.,Ltd/Lecture/KOSEN69 - software-security/slides/pptx/assets/logo-small.png">    </p:cNvPr>
+          <p:cNvPr id="9" name="Image 1" descr="/private/tmp/claude-501/-Users-pop7-Library-CloudStorage-OneDrive-MonsterConnectCo--Ltd-Lecture-KOSEN69---software-security/e6d6556f-17de-403d-a9a0-cf2f846149b4/scratchpad/tree/slides/pptx/assets/logo-small.png">    </p:cNvPr>
           <p:cNvPicPr>
             <a:picLocks noChangeAspect="1"/>
           </p:cNvPicPr>
@@ -3406,7 +3390,7 @@
       </p:sp>
       <p:pic>
         <p:nvPicPr>
-          <p:cNvPr id="15" name="Image 1" descr="/Users/pop7/Library/CloudStorage/OneDrive-MonsterConnectCo.,Ltd/Lecture/KOSEN69 - software-security/slides/pptx/assets/logo-small.png">    </p:cNvPr>
+          <p:cNvPr id="15" name="Image 1" descr="/private/tmp/claude-501/-Users-pop7-Library-CloudStorage-OneDrive-MonsterConnectCo--Ltd-Lecture-KOSEN69---software-security/e6d6556f-17de-403d-a9a0-cf2f846149b4/scratchpad/tree/slides/pptx/assets/logo-small.png">    </p:cNvPr>
           <p:cNvPicPr>
             <a:picLocks noChangeAspect="1"/>
           </p:cNvPicPr>
@@ -3812,7 +3796,7 @@
       </p:sp>
       <p:pic>
         <p:nvPicPr>
-          <p:cNvPr id="10" name="Image 1" descr="/Users/pop7/Library/CloudStorage/OneDrive-MonsterConnectCo.,Ltd/Lecture/KOSEN69 - software-security/slides/pptx/assets/logo-small.png">    </p:cNvPr>
+          <p:cNvPr id="10" name="Image 1" descr="/private/tmp/claude-501/-Users-pop7-Library-CloudStorage-OneDrive-MonsterConnectCo--Ltd-Lecture-KOSEN69---software-security/e6d6556f-17de-403d-a9a0-cf2f846149b4/scratchpad/tree/slides/pptx/assets/logo-small.png">    </p:cNvPr>
           <p:cNvPicPr>
             <a:picLocks noChangeAspect="1"/>
           </p:cNvPicPr>
@@ -4071,7 +4055,7 @@
       </p:sp>
       <p:pic>
         <p:nvPicPr>
-          <p:cNvPr id="8" name="Image 1" descr="/Users/pop7/Library/CloudStorage/OneDrive-MonsterConnectCo.,Ltd/Lecture/KOSEN69 - software-security/slides/pptx/assets/logo-small.png">    </p:cNvPr>
+          <p:cNvPr id="8" name="Image 1" descr="/private/tmp/claude-501/-Users-pop7-Library-CloudStorage-OneDrive-MonsterConnectCo--Ltd-Lecture-KOSEN69---software-security/e6d6556f-17de-403d-a9a0-cf2f846149b4/scratchpad/tree/slides/pptx/assets/logo-small.png">    </p:cNvPr>
           <p:cNvPicPr>
             <a:picLocks noChangeAspect="1"/>
           </p:cNvPicPr>
@@ -4372,7 +4356,7 @@
       </p:sp>
       <p:pic>
         <p:nvPicPr>
-          <p:cNvPr id="8" name="Image 1" descr="/Users/pop7/Library/CloudStorage/OneDrive-MonsterConnectCo.,Ltd/Lecture/KOSEN69 - software-security/slides/pptx/assets/logo-small.png">    </p:cNvPr>
+          <p:cNvPr id="8" name="Image 1" descr="/private/tmp/claude-501/-Users-pop7-Library-CloudStorage-OneDrive-MonsterConnectCo--Ltd-Lecture-KOSEN69---software-security/e6d6556f-17de-403d-a9a0-cf2f846149b4/scratchpad/tree/slides/pptx/assets/logo-small.png">    </p:cNvPr>
           <p:cNvPicPr>
             <a:picLocks noChangeAspect="1"/>
           </p:cNvPicPr>
@@ -4506,7 +4490,7 @@
       </p:sp>
       <p:pic>
         <p:nvPicPr>
-          <p:cNvPr id="4" name="Image 0" descr="/Users/pop7/Library/CloudStorage/OneDrive-MonsterConnectCo.,Ltd/Lecture/KOSEN69 - software-security/slides/pptx/assets/logo-small.png">    </p:cNvPr>
+          <p:cNvPr id="4" name="Image 0" descr="/private/tmp/claude-501/-Users-pop7-Library-CloudStorage-OneDrive-MonsterConnectCo--Ltd-Lecture-KOSEN69---software-security/e6d6556f-17de-403d-a9a0-cf2f846149b4/scratchpad/tree/slides/pptx/assets/logo-small.png">    </p:cNvPr>
           <p:cNvPicPr>
             <a:picLocks noChangeAspect="1"/>
           </p:cNvPicPr>
@@ -4849,7 +4833,7 @@
       </p:sp>
       <p:pic>
         <p:nvPicPr>
-          <p:cNvPr id="8" name="Image 1" descr="/Users/pop7/Library/CloudStorage/OneDrive-MonsterConnectCo.,Ltd/Lecture/KOSEN69 - software-security/slides/pptx/assets/logo-small.png">    </p:cNvPr>
+          <p:cNvPr id="8" name="Image 1" descr="/private/tmp/claude-501/-Users-pop7-Library-CloudStorage-OneDrive-MonsterConnectCo--Ltd-Lecture-KOSEN69---software-security/e6d6556f-17de-403d-a9a0-cf2f846149b4/scratchpad/tree/slides/pptx/assets/logo-small.png">    </p:cNvPr>
           <p:cNvPicPr>
             <a:picLocks noChangeAspect="1"/>
           </p:cNvPicPr>
@@ -5150,7 +5134,7 @@
       </p:sp>
       <p:pic>
         <p:nvPicPr>
-          <p:cNvPr id="8" name="Image 1" descr="/Users/pop7/Library/CloudStorage/OneDrive-MonsterConnectCo.,Ltd/Lecture/KOSEN69 - software-security/slides/pptx/assets/logo-small.png">    </p:cNvPr>
+          <p:cNvPr id="8" name="Image 1" descr="/private/tmp/claude-501/-Users-pop7-Library-CloudStorage-OneDrive-MonsterConnectCo--Ltd-Lecture-KOSEN69---software-security/e6d6556f-17de-403d-a9a0-cf2f846149b4/scratchpad/tree/slides/pptx/assets/logo-small.png">    </p:cNvPr>
           <p:cNvPicPr>
             <a:picLocks noChangeAspect="1"/>
           </p:cNvPicPr>
@@ -6153,7 +6137,7 @@
       </p:sp>
       <p:pic>
         <p:nvPicPr>
-          <p:cNvPr id="9" name="Image 1" descr="/Users/pop7/Library/CloudStorage/OneDrive-MonsterConnectCo.,Ltd/Lecture/KOSEN69 - software-security/slides/pptx/assets/logo-small.png">    </p:cNvPr>
+          <p:cNvPr id="9" name="Image 1" descr="/private/tmp/claude-501/-Users-pop7-Library-CloudStorage-OneDrive-MonsterConnectCo--Ltd-Lecture-KOSEN69---software-security/e6d6556f-17de-403d-a9a0-cf2f846149b4/scratchpad/tree/slides/pptx/assets/logo-small.png">    </p:cNvPr>
           <p:cNvPicPr>
             <a:picLocks noChangeAspect="1"/>
           </p:cNvPicPr>
@@ -6496,7 +6480,7 @@
       </p:sp>
       <p:pic>
         <p:nvPicPr>
-          <p:cNvPr id="10" name="Image 1" descr="/Users/pop7/Library/CloudStorage/OneDrive-MonsterConnectCo.,Ltd/Lecture/KOSEN69 - software-security/slides/pptx/assets/logo-small.png">    </p:cNvPr>
+          <p:cNvPr id="10" name="Image 1" descr="/private/tmp/claude-501/-Users-pop7-Library-CloudStorage-OneDrive-MonsterConnectCo--Ltd-Lecture-KOSEN69---software-security/e6d6556f-17de-403d-a9a0-cf2f846149b4/scratchpad/tree/slides/pptx/assets/logo-small.png">    </p:cNvPr>
           <p:cNvPicPr>
             <a:picLocks noChangeAspect="1"/>
           </p:cNvPicPr>
@@ -6797,7 +6781,7 @@
       </p:sp>
       <p:pic>
         <p:nvPicPr>
-          <p:cNvPr id="8" name="Image 1" descr="/Users/pop7/Library/CloudStorage/OneDrive-MonsterConnectCo.,Ltd/Lecture/KOSEN69 - software-security/slides/pptx/assets/logo-small.png">    </p:cNvPr>
+          <p:cNvPr id="8" name="Image 1" descr="/private/tmp/claude-501/-Users-pop7-Library-CloudStorage-OneDrive-MonsterConnectCo--Ltd-Lecture-KOSEN69---software-security/e6d6556f-17de-403d-a9a0-cf2f846149b4/scratchpad/tree/slides/pptx/assets/logo-small.png">    </p:cNvPr>
           <p:cNvPicPr>
             <a:picLocks noChangeAspect="1"/>
           </p:cNvPicPr>
@@ -7182,7 +7166,7 @@
       </p:sp>
       <p:pic>
         <p:nvPicPr>
-          <p:cNvPr id="10" name="Image 1" descr="/Users/pop7/Library/CloudStorage/OneDrive-MonsterConnectCo.,Ltd/Lecture/KOSEN69 - software-security/slides/pptx/assets/logo-small.png">    </p:cNvPr>
+          <p:cNvPr id="10" name="Image 1" descr="/private/tmp/claude-501/-Users-pop7-Library-CloudStorage-OneDrive-MonsterConnectCo--Ltd-Lecture-KOSEN69---software-security/e6d6556f-17de-403d-a9a0-cf2f846149b4/scratchpad/tree/slides/pptx/assets/logo-small.png">    </p:cNvPr>
           <p:cNvPicPr>
             <a:picLocks noChangeAspect="1"/>
           </p:cNvPicPr>
@@ -7504,7 +7488,7 @@
       </p:sp>
       <p:pic>
         <p:nvPicPr>
-          <p:cNvPr id="8" name="Image 1" descr="/Users/pop7/Library/CloudStorage/OneDrive-MonsterConnectCo.,Ltd/Lecture/KOSEN69 - software-security/slides/pptx/assets/logo-small.png">    </p:cNvPr>
+          <p:cNvPr id="8" name="Image 1" descr="/private/tmp/claude-501/-Users-pop7-Library-CloudStorage-OneDrive-MonsterConnectCo--Ltd-Lecture-KOSEN69---software-security/e6d6556f-17de-403d-a9a0-cf2f846149b4/scratchpad/tree/slides/pptx/assets/logo-small.png">    </p:cNvPr>
           <p:cNvPicPr>
             <a:picLocks noChangeAspect="1"/>
           </p:cNvPicPr>
@@ -7868,7 +7852,7 @@
       </p:sp>
       <p:pic>
         <p:nvPicPr>
-          <p:cNvPr id="10" name="Image 1" descr="/Users/pop7/Library/CloudStorage/OneDrive-MonsterConnectCo.,Ltd/Lecture/KOSEN69 - software-security/slides/pptx/assets/logo-small.png">    </p:cNvPr>
+          <p:cNvPr id="10" name="Image 1" descr="/private/tmp/claude-501/-Users-pop7-Library-CloudStorage-OneDrive-MonsterConnectCo--Ltd-Lecture-KOSEN69---software-security/e6d6556f-17de-403d-a9a0-cf2f846149b4/scratchpad/tree/slides/pptx/assets/logo-small.png">    </p:cNvPr>
           <p:cNvPicPr>
             <a:picLocks noChangeAspect="1"/>
           </p:cNvPicPr>
